--- a/system-design-101/vi/lessons/sd-13-006/slides/sd-13-006.pptx
+++ b/system-design-101/vi/lessons/sd-13-006/slides/sd-13-006.pptx
@@ -6826,12 +6826,15 @@
               <a:lnSpc>
                 <a:spcPts val="3570"/>
               </a:lnSpc>
+              <a:spcAft>
+                <a:spcPts val="600"/>
+              </a:spcAft>
               <a:buSzPct val="100000"/>
               <a:buFont typeface="Arial"/>
               <a:buChar char="•"/>
             </a:pPr>
             <a:r>
-              <a:rPr lang="en-US" sz="2550" dirty="0" spc="-3" kern="0">
+              <a:rPr lang="en-US" sz="2550" dirty="0" spc="-26" kern="0">
                 <a:solidFill>
                   <a:srgbClr val="E4E1D8"/>
                 </a:solidFill>
@@ -6839,7 +6842,106 @@
                 <a:ea typeface="Be Vietnam Pro" pitchFamily="34" charset="-122"/>
                 <a:cs typeface="Be Vietnam Pro" pitchFamily="34" charset="-120"/>
               </a:rPr>
-              <a:t>So</a:t>
+              <a:t>targetPort</a:t>
+            </a:r>
+            <a:r>
+              <a:rPr lang="en-US" sz="2550" dirty="0" spc="0" kern="0">
+                <a:solidFill>
+                  <a:srgbClr val="E4E1D8"/>
+                </a:solidFill>
+                <a:latin typeface="Be Vietnam Pro" pitchFamily="34" charset="0"/>
+                <a:ea typeface="Be Vietnam Pro" pitchFamily="34" charset="-122"/>
+                <a:cs typeface="Be Vietnam Pro" pitchFamily="34" charset="-120"/>
+              </a:rPr>
+              <a:t> phải khớp cổng</a:t>
+            </a:r>
+            <a:r>
+              <a:rPr lang="en-US" sz="2550" dirty="0" spc="-10" kern="0">
+                <a:solidFill>
+                  <a:srgbClr val="E4E1D8"/>
+                </a:solidFill>
+                <a:latin typeface="Be Vietnam Pro" pitchFamily="34" charset="0"/>
+                <a:ea typeface="Be Vietnam Pro" pitchFamily="34" charset="-122"/>
+                <a:cs typeface="Be Vietnam Pro" pitchFamily="34" charset="-120"/>
+              </a:rPr>
+              <a:t> container</a:t>
+            </a:r>
+            <a:r>
+              <a:rPr lang="en-US" sz="2550" dirty="0" spc="-1" kern="0">
+                <a:solidFill>
+                  <a:srgbClr val="E4E1D8"/>
+                </a:solidFill>
+                <a:latin typeface="Be Vietnam Pro" pitchFamily="34" charset="0"/>
+                <a:ea typeface="Be Vietnam Pro" pitchFamily="34" charset="-122"/>
+                <a:cs typeface="Be Vietnam Pro" pitchFamily="34" charset="-120"/>
+              </a:rPr>
+              <a:t> nhận</a:t>
+            </a:r>
+            <a:r>
+              <a:rPr lang="en-US" sz="2550" dirty="0" spc="-18" kern="0">
+                <a:solidFill>
+                  <a:srgbClr val="E4E1D8"/>
+                </a:solidFill>
+                <a:latin typeface="Be Vietnam Pro" pitchFamily="34" charset="0"/>
+                <a:ea typeface="Be Vietnam Pro" pitchFamily="34" charset="-122"/>
+                <a:cs typeface="Be Vietnam Pro" pitchFamily="34" charset="-120"/>
+              </a:rPr>
+              <a:t> traffic.</a:t>
+            </a:r>
+            <a:endParaRPr lang="en-US" sz="2550" dirty="0"/>
+          </a:p>
+          <a:p>
+            <a:pPr algn="l" marL="323850" indent="-231371">
+              <a:lnSpc>
+                <a:spcPts val="3570"/>
+              </a:lnSpc>
+              <a:buSzPct val="100000"/>
+              <a:buFont typeface="Arial"/>
+              <a:buChar char="•"/>
+            </a:pPr>
+            <a:r>
+              <a:rPr lang="en-US" sz="2550" dirty="0" spc="-1" kern="0">
+                <a:solidFill>
+                  <a:srgbClr val="E4E1D8"/>
+                </a:solidFill>
+                <a:latin typeface="Be Vietnam Pro" pitchFamily="34" charset="0"/>
+                <a:ea typeface="Be Vietnam Pro" pitchFamily="34" charset="-122"/>
+                <a:cs typeface="Be Vietnam Pro" pitchFamily="34" charset="-120"/>
+              </a:rPr>
+              <a:t>Không ghi</a:t>
+            </a:r>
+            <a:r>
+              <a:rPr lang="en-US" sz="2550" dirty="0" spc="-24" kern="0">
+                <a:solidFill>
+                  <a:srgbClr val="E4E1D8"/>
+                </a:solidFill>
+                <a:latin typeface="Be Vietnam Pro" pitchFamily="34" charset="0"/>
+                <a:ea typeface="Be Vietnam Pro" pitchFamily="34" charset="-122"/>
+                <a:cs typeface="Be Vietnam Pro" pitchFamily="34" charset="-120"/>
+              </a:rPr>
+              <a:t> targetPort</a:t>
+            </a:r>
+            <a:r>
+              <a:rPr lang="en-US" sz="2550" dirty="0" spc="2" kern="0">
+                <a:solidFill>
+                  <a:srgbClr val="E4E1D8"/>
+                </a:solidFill>
+                <a:latin typeface="Be Vietnam Pro" pitchFamily="34" charset="0"/>
+                <a:ea typeface="Be Vietnam Pro" pitchFamily="34" charset="-122"/>
+                <a:cs typeface="Be Vietnam Pro" pitchFamily="34" charset="-120"/>
+              </a:rPr>
+              <a:t> thì</a:t>
+            </a:r>
+            <a:r>
+              <a:rPr lang="en-US" sz="2550" dirty="0" spc="0" kern="0">
+                <a:solidFill>
+                  <a:srgbClr val="E4E1D8"/>
+                </a:solidFill>
+                <a:latin typeface="Be Vietnam Pro" pitchFamily="34" charset="0"/>
+                <a:ea typeface="Be Vietnam Pro" pitchFamily="34" charset="-122"/>
+                <a:cs typeface="Be Vietnam Pro" pitchFamily="34" charset="-120"/>
+              </a:rPr>
+              <a:t> nó</a:t>
             </a:r>
             <a:r>
               <a:rPr lang="en-US" sz="2550" dirty="0" spc="-2" kern="0">
@@ -6850,7 +6952,7 @@
                 <a:ea typeface="Be Vietnam Pro" pitchFamily="34" charset="-122"/>
                 <a:cs typeface="Be Vietnam Pro" pitchFamily="34" charset="-120"/>
               </a:rPr>
-              <a:t> port của</a:t>
+              <a:t> bằng</a:t>
             </a:r>
             <a:r>
               <a:rPr lang="en-US" sz="2550" dirty="0" spc="-1" kern="0">
@@ -6861,51 +6963,7 @@
                 <a:ea typeface="Be Vietnam Pro" pitchFamily="34" charset="-122"/>
                 <a:cs typeface="Be Vietnam Pro" pitchFamily="34" charset="-120"/>
               </a:rPr>
-              <a:t> Service</a:t>
-            </a:r>
-            <a:r>
-              <a:rPr lang="en-US" sz="2550" dirty="0" spc="-15" kern="0">
-                <a:solidFill>
-                  <a:srgbClr val="E4E1D8"/>
-                </a:solidFill>
-                <a:latin typeface="Be Vietnam Pro" pitchFamily="34" charset="0"/>
-                <a:ea typeface="Be Vietnam Pro" pitchFamily="34" charset="-122"/>
-                <a:cs typeface="Be Vietnam Pro" pitchFamily="34" charset="-120"/>
-              </a:rPr>
-              <a:t> với</a:t>
-            </a:r>
-            <a:r>
-              <a:rPr lang="en-US" sz="2550" dirty="0" spc="-24" kern="0">
-                <a:solidFill>
-                  <a:srgbClr val="E4E1D8"/>
-                </a:solidFill>
-                <a:latin typeface="Be Vietnam Pro" pitchFamily="34" charset="0"/>
-                <a:ea typeface="Be Vietnam Pro" pitchFamily="34" charset="-122"/>
-                <a:cs typeface="Be Vietnam Pro" pitchFamily="34" charset="-120"/>
-              </a:rPr>
-              <a:t> targetPort</a:t>
-            </a:r>
-            <a:r>
-              <a:rPr lang="en-US" sz="2550" dirty="0" spc="-1" kern="0">
-                <a:solidFill>
-                  <a:srgbClr val="E4E1D8"/>
-                </a:solidFill>
-                <a:latin typeface="Be Vietnam Pro" pitchFamily="34" charset="0"/>
-                <a:ea typeface="Be Vietnam Pro" pitchFamily="34" charset="-122"/>
-                <a:cs typeface="Be Vietnam Pro" pitchFamily="34" charset="-120"/>
-              </a:rPr>
-              <a:t> của</a:t>
-            </a:r>
-            <a:r>
-              <a:rPr lang="en-US" sz="2550" dirty="0" spc="-11" kern="0">
-                <a:solidFill>
-                  <a:srgbClr val="E4E1D8"/>
-                </a:solidFill>
-                <a:latin typeface="Be Vietnam Pro" pitchFamily="34" charset="0"/>
-                <a:ea typeface="Be Vietnam Pro" pitchFamily="34" charset="-122"/>
-                <a:cs typeface="Be Vietnam Pro" pitchFamily="34" charset="-120"/>
-              </a:rPr>
-              <a:t> Pod.</a:t>
+              <a:t> port.</a:t>
             </a:r>
             <a:endParaRPr lang="en-US" sz="2550" dirty="0"/>
           </a:p>

--- a/system-design-101/vi/lessons/sd-13-006/slides/sd-13-006.pptx
+++ b/system-design-101/vi/lessons/sd-13-006/slides/sd-13-006.pptx
@@ -1794,7 +1794,7 @@
         <p:spPr>
           <a:xfrm>
             <a:off x="914400" y="1524000"/>
-            <a:ext cx="8191500" cy="3238500"/>
+            <a:ext cx="8191500" cy="5381625"/>
           </a:xfrm>
           <a:prstGeom prst="rect">
             <a:avLst/>
@@ -1803,17 +1803,17 @@
           <a:ln/>
         </p:spPr>
         <p:txBody>
-          <a:bodyPr wrap="square" lIns="0" tIns="56007" rIns="0" bIns="-56007" rtlCol="0" anchor="t"/>
+          <a:bodyPr wrap="square" lIns="0" tIns="72009" rIns="0" bIns="-72009" rtlCol="0" anchor="t"/>
           <a:lstStyle/>
           <a:p>
             <a:pPr algn="l" indent="0" marL="0">
               <a:lnSpc>
-                <a:spcPts val="6552"/>
+                <a:spcPts val="8424"/>
               </a:lnSpc>
               <a:buNone/>
             </a:pPr>
             <a:r>
-              <a:rPr lang="en-US" sz="6300" dirty="0" spc="6" kern="0">
+              <a:rPr lang="en-US" sz="8100" dirty="0" spc="13" kern="0">
                 <a:solidFill>
                   <a:srgbClr val="F3EEE3"/>
                 </a:solidFill>
@@ -1824,7 +1824,7 @@
               <a:t>Service</a:t>
             </a:r>
             <a:r>
-              <a:rPr lang="en-US" sz="6300" dirty="0" spc="-24" kern="0">
+              <a:rPr lang="en-US" sz="8100" dirty="0" spc="-29" kern="0">
                 <a:solidFill>
                   <a:srgbClr val="F3EEE3"/>
                 </a:solidFill>
@@ -1835,7 +1835,7 @@
               <a:t> Kubernetes</a:t>
             </a:r>
             <a:r>
-              <a:rPr lang="en-US" sz="6300" dirty="0" spc="0" kern="0">
+              <a:rPr lang="en-US" sz="8100" dirty="0" spc="-2" kern="0">
                 <a:solidFill>
                   <a:srgbClr val="F3EEE3"/>
                 </a:solidFill>
@@ -1846,7 +1846,7 @@
               <a:t> không</a:t>
             </a:r>
             <a:r>
-              <a:rPr lang="en-US" sz="6300" dirty="0" spc="2" kern="0">
+              <a:rPr lang="en-US" sz="8100" dirty="0" spc="0" kern="0">
                 <a:solidFill>
                   <a:srgbClr val="F3EEE3"/>
                 </a:solidFill>
@@ -1857,7 +1857,7 @@
               <a:t> nhận</a:t>
             </a:r>
             <a:r>
-              <a:rPr lang="en-US" sz="6300" dirty="0" spc="-14" kern="0">
+              <a:rPr lang="en-US" sz="8100" dirty="0" spc="-17" kern="0">
                 <a:solidFill>
                   <a:srgbClr val="F3EEE3"/>
                 </a:solidFill>
@@ -1868,7 +1868,7 @@
               <a:t> traffic:</a:t>
             </a:r>
             <a:r>
-              <a:rPr lang="en-US" sz="6300" dirty="0" spc="3" kern="0">
+              <a:rPr lang="en-US" sz="8100" dirty="0" spc="1" kern="0">
                 <a:solidFill>
                   <a:srgbClr val="F3EEE3"/>
                 </a:solidFill>
@@ -1879,7 +1879,7 @@
               <a:t> năm</a:t>
             </a:r>
             <a:r>
-              <a:rPr lang="en-US" sz="6300" dirty="0" spc="0" kern="0">
+              <a:rPr lang="en-US" sz="8100" dirty="0" spc="2" kern="0">
                 <a:solidFill>
                   <a:srgbClr val="F3EEE3"/>
                 </a:solidFill>
@@ -1887,10 +1887,10 @@
                 <a:ea typeface="Bricolage Grotesque ExtraBold" pitchFamily="34" charset="-122"/>
                 <a:cs typeface="Bricolage Grotesque ExtraBold" pitchFamily="34" charset="-120"/>
               </a:rPr>
-              <a:t> chỗ cần</a:t>
-            </a:r>
-            <a:r>
-              <a:rPr lang="en-US" sz="6300" dirty="0" spc="2" kern="0">
+              <a:t> chỗ</a:t>
+            </a:r>
+            <a:r>
+              <a:rPr lang="en-US" sz="8100" dirty="0" spc="-1" kern="0">
                 <a:solidFill>
                   <a:srgbClr val="F3EEE3"/>
                 </a:solidFill>
@@ -1898,10 +1898,10 @@
                 <a:ea typeface="Bricolage Grotesque ExtraBold" pitchFamily="34" charset="-122"/>
                 <a:cs typeface="Bricolage Grotesque ExtraBold" pitchFamily="34" charset="-120"/>
               </a:rPr>
-              <a:t> kiểm</a:t>
-            </a:r>
-            <a:r>
-              <a:rPr lang="en-US" sz="6300" dirty="0" spc="-26" kern="0">
+              <a:t> cần</a:t>
+            </a:r>
+            <a:r>
+              <a:rPr lang="en-US" sz="8100" dirty="0" spc="1" kern="0">
                 <a:solidFill>
                   <a:srgbClr val="F3EEE3"/>
                 </a:solidFill>
@@ -1909,9 +1909,20 @@
                 <a:ea typeface="Bricolage Grotesque ExtraBold" pitchFamily="34" charset="-122"/>
                 <a:cs typeface="Bricolage Grotesque ExtraBold" pitchFamily="34" charset="-120"/>
               </a:rPr>
+              <a:t> kiểm</a:t>
+            </a:r>
+            <a:r>
+              <a:rPr lang="en-US" sz="8100" dirty="0" spc="-34" kern="0">
+                <a:solidFill>
+                  <a:srgbClr val="F3EEE3"/>
+                </a:solidFill>
+                <a:latin typeface="Bricolage Grotesque ExtraBold" pitchFamily="34" charset="0"/>
+                <a:ea typeface="Bricolage Grotesque ExtraBold" pitchFamily="34" charset="-122"/>
+                <a:cs typeface="Bricolage Grotesque ExtraBold" pitchFamily="34" charset="-120"/>
+              </a:rPr>
               <a:t> tra</a:t>
             </a:r>
-            <a:endParaRPr lang="en-US" sz="6300" dirty="0"/>
+            <a:endParaRPr lang="en-US" sz="8100" dirty="0"/>
           </a:p>
         </p:txBody>
       </p:sp>
@@ -1923,7 +1934,7 @@
         </p:nvSpPr>
         <p:spPr>
           <a:xfrm>
-            <a:off x="914400" y="5048250"/>
+            <a:off x="914400" y="7191375"/>
             <a:ext cx="8191500" cy="1047750"/>
           </a:xfrm>
           <a:prstGeom prst="rect">
@@ -2042,7 +2053,7 @@
         </p:nvSpPr>
         <p:spPr>
           <a:xfrm>
-            <a:off x="914400" y="6191250"/>
+            <a:off x="914400" y="8334375"/>
             <a:ext cx="8191500" cy="419100"/>
           </a:xfrm>
           <a:prstGeom prst="rect">
@@ -2186,7 +2197,7 @@
               <a:t> nhóm</a:t>
             </a:r>
             <a:r>
-              <a:rPr lang="en-US" sz="1650" dirty="0" spc="-3" kern="0">
+              <a:rPr lang="en-US" sz="1650" dirty="0" spc="-4" kern="0">
                 <a:solidFill>
                   <a:srgbClr val="9AA0B5"/>
                 </a:solidFill>
@@ -2194,10 +2205,10 @@
                 <a:ea typeface="Be Vietnam Pro" pitchFamily="34" charset="-122"/>
                 <a:cs typeface="Be Vietnam Pro" pitchFamily="34" charset="-120"/>
               </a:rPr>
-              <a:t> Quan</a:t>
-            </a:r>
-            <a:r>
-              <a:rPr lang="en-US" sz="1650" dirty="0" spc="-9" kern="0">
+              <a:t> DevOps</a:t>
+            </a:r>
+            <a:r>
+              <a:rPr lang="en-US" sz="1650" dirty="0" spc="-7" kern="0">
                 <a:solidFill>
                   <a:srgbClr val="9AA0B5"/>
                 </a:solidFill>
@@ -2205,7 +2216,7 @@
                 <a:ea typeface="Be Vietnam Pro" pitchFamily="34" charset="-122"/>
                 <a:cs typeface="Be Vietnam Pro" pitchFamily="34" charset="-120"/>
               </a:rPr>
-              <a:t> sát</a:t>
+              <a:t> và</a:t>
             </a:r>
             <a:r>
               <a:rPr lang="en-US" sz="1650" dirty="0" spc="3" kern="0">
@@ -2216,18 +2227,7 @@
                 <a:ea typeface="Be Vietnam Pro" pitchFamily="34" charset="-122"/>
                 <a:cs typeface="Be Vietnam Pro" pitchFamily="34" charset="-120"/>
               </a:rPr>
-              <a:t> hệ</a:t>
-            </a:r>
-            <a:r>
-              <a:rPr lang="en-US" sz="1650" dirty="0" spc="1" kern="0">
-                <a:solidFill>
-                  <a:srgbClr val="9AA0B5"/>
-                </a:solidFill>
-                <a:latin typeface="Be Vietnam Pro" pitchFamily="34" charset="0"/>
-                <a:ea typeface="Be Vietnam Pro" pitchFamily="34" charset="-122"/>
-                <a:cs typeface="Be Vietnam Pro" pitchFamily="34" charset="-120"/>
-              </a:rPr>
-              <a:t> thống</a:t>
+              <a:t> CI/CD</a:t>
             </a:r>
             <a:endParaRPr lang="en-US" sz="1650" dirty="0"/>
           </a:p>

--- a/system-design-101/vi/lessons/sd-13-006/slides/sd-13-006.pptx
+++ b/system-design-101/vi/lessons/sd-13-006/slides/sd-13-006.pptx
@@ -3291,11 +3291,11 @@
         <p:spPr>
           <a:xfrm>
             <a:off x="914400" y="2857500"/>
-            <a:ext cx="9144000" cy="1762125"/>
+            <a:ext cx="9144000" cy="1666875"/>
           </a:xfrm>
           <a:prstGeom prst="roundRect">
             <a:avLst>
-              <a:gd name="adj" fmla="val 15135"/>
+              <a:gd name="adj" fmla="val 16000"/>
             </a:avLst>
           </a:prstGeom>
           <a:solidFill>
@@ -3312,7 +3312,7 @@
         </p:nvSpPr>
         <p:spPr>
           <a:xfrm>
-            <a:off x="1295400" y="3124200"/>
+            <a:off x="1295400" y="3076575"/>
             <a:ext cx="8382000" cy="533400"/>
           </a:xfrm>
           <a:prstGeom prst="rect">
@@ -3351,7 +3351,7 @@
         </p:nvSpPr>
         <p:spPr>
           <a:xfrm>
-            <a:off x="1295400" y="3771900"/>
+            <a:off x="1295400" y="3724275"/>
             <a:ext cx="8382000" cy="666750"/>
           </a:xfrm>
           <a:prstGeom prst="rect">
@@ -3361,17 +3361,17 @@
           <a:ln/>
         </p:spPr>
         <p:txBody>
-          <a:bodyPr wrap="square" lIns="0" tIns="12144" rIns="0" bIns="-12144" rtlCol="0" anchor="t"/>
+          <a:bodyPr wrap="square" lIns="0" tIns="13764" rIns="0" bIns="-13764" rtlCol="0" anchor="t"/>
           <a:lstStyle/>
           <a:p>
             <a:pPr algn="l" indent="0" marL="0">
               <a:lnSpc>
-                <a:spcPts val="2925"/>
+                <a:spcPts val="3315"/>
               </a:lnSpc>
               <a:buNone/>
             </a:pPr>
             <a:r>
-              <a:rPr lang="en-US" sz="2250" dirty="0" spc="-3" kern="0">
+              <a:rPr lang="en-US" sz="2550" dirty="0" spc="-1" kern="0">
                 <a:solidFill>
                   <a:srgbClr val="E4E1D8"/>
                 </a:solidFill>
@@ -3382,7 +3382,7 @@
               <a:t>Domain</a:t>
             </a:r>
             <a:r>
-              <a:rPr lang="en-US" sz="2250" dirty="0" spc="-2" kern="0">
+              <a:rPr lang="en-US" sz="2550" dirty="0" spc="1" kern="0">
                 <a:solidFill>
                   <a:srgbClr val="E4E1D8"/>
                 </a:solidFill>
@@ -3393,7 +3393,7 @@
               <a:t> Name</a:t>
             </a:r>
             <a:r>
-              <a:rPr lang="en-US" sz="2250" dirty="0" spc="-11" kern="0">
+              <a:rPr lang="en-US" sz="2550" dirty="0" spc="-14" kern="0">
                 <a:solidFill>
                   <a:srgbClr val="E4E1D8"/>
                 </a:solidFill>
@@ -3404,7 +3404,7 @@
               <a:t> System:</a:t>
             </a:r>
             <a:r>
-              <a:rPr lang="en-US" sz="2250" dirty="0" spc="1" kern="0">
+              <a:rPr lang="en-US" sz="2550" dirty="0" spc="0" kern="0">
                 <a:solidFill>
                   <a:srgbClr val="E4E1D8"/>
                 </a:solidFill>
@@ -3415,7 +3415,7 @@
               <a:t> hệ thống</a:t>
             </a:r>
             <a:r>
-              <a:rPr lang="en-US" sz="2250" dirty="0" spc="-11" kern="0">
+              <a:rPr lang="en-US" sz="2550" dirty="0" spc="-11" kern="0">
                 <a:solidFill>
                   <a:srgbClr val="E4E1D8"/>
                 </a:solidFill>
@@ -3426,7 +3426,7 @@
               <a:t> tên</a:t>
             </a:r>
             <a:r>
-              <a:rPr lang="en-US" sz="2250" dirty="0" spc="-1" kern="0">
+              <a:rPr lang="en-US" sz="2550" dirty="0" spc="0" kern="0">
                 <a:solidFill>
                   <a:srgbClr val="E4E1D8"/>
                 </a:solidFill>
@@ -3436,7 +3436,7 @@
               </a:rPr>
               <a:t> miền</a:t>
             </a:r>
-            <a:endParaRPr lang="en-US" sz="2250" dirty="0"/>
+            <a:endParaRPr lang="en-US" sz="2550" dirty="0"/>
           </a:p>
         </p:txBody>
       </p:sp>
@@ -3448,12 +3448,12 @@
         </p:nvSpPr>
         <p:spPr>
           <a:xfrm>
-            <a:off x="914400" y="4810125"/>
-            <a:ext cx="9144000" cy="1762125"/>
+            <a:off x="914400" y="4667250"/>
+            <a:ext cx="9144000" cy="2000250"/>
           </a:xfrm>
           <a:prstGeom prst="roundRect">
             <a:avLst>
-              <a:gd name="adj" fmla="val 15135"/>
+              <a:gd name="adj" fmla="val 13333"/>
             </a:avLst>
           </a:prstGeom>
           <a:solidFill>
@@ -3470,7 +3470,7 @@
         </p:nvSpPr>
         <p:spPr>
           <a:xfrm>
-            <a:off x="1295400" y="5076825"/>
+            <a:off x="1295400" y="4886325"/>
             <a:ext cx="8382000" cy="533400"/>
           </a:xfrm>
           <a:prstGeom prst="rect">
@@ -3509,8 +3509,8 @@
         </p:nvSpPr>
         <p:spPr>
           <a:xfrm>
-            <a:off x="1295400" y="5724525"/>
-            <a:ext cx="8382000" cy="666750"/>
+            <a:off x="1295400" y="5534025"/>
+            <a:ext cx="8382000" cy="876300"/>
           </a:xfrm>
           <a:prstGeom prst="rect">
             <a:avLst/>
@@ -3519,17 +3519,17 @@
           <a:ln/>
         </p:spPr>
         <p:txBody>
-          <a:bodyPr wrap="square" lIns="0" tIns="12144" rIns="0" bIns="-12144" rtlCol="0" anchor="t"/>
+          <a:bodyPr wrap="square" lIns="0" tIns="13764" rIns="0" bIns="-13764" rtlCol="0" anchor="t"/>
           <a:lstStyle/>
           <a:p>
             <a:pPr algn="l" indent="0" marL="0">
               <a:lnSpc>
-                <a:spcPts val="2925"/>
+                <a:spcPts val="3315"/>
               </a:lnSpc>
               <a:buNone/>
             </a:pPr>
             <a:r>
-              <a:rPr lang="en-US" sz="2250" dirty="0" spc="-43" kern="0">
+              <a:rPr lang="en-US" sz="2550" dirty="0" spc="-47" kern="0">
                 <a:solidFill>
                   <a:srgbClr val="E4E1D8"/>
                 </a:solidFill>
@@ -3540,7 +3540,7 @@
               <a:t>HyperText</a:t>
             </a:r>
             <a:r>
-              <a:rPr lang="en-US" sz="2250" dirty="0" spc="-35" kern="0">
+              <a:rPr lang="en-US" sz="2550" dirty="0" spc="-41" kern="0">
                 <a:solidFill>
                   <a:srgbClr val="E4E1D8"/>
                 </a:solidFill>
@@ -3551,7 +3551,7 @@
               <a:t> Transfer</a:t>
             </a:r>
             <a:r>
-              <a:rPr lang="en-US" sz="2250" dirty="0" spc="-18" kern="0">
+              <a:rPr lang="en-US" sz="2550" dirty="0" spc="-18" kern="0">
                 <a:solidFill>
                   <a:srgbClr val="E4E1D8"/>
                 </a:solidFill>
@@ -3562,7 +3562,7 @@
               <a:t> Protocol:</a:t>
             </a:r>
             <a:r>
-              <a:rPr lang="en-US" sz="2250" dirty="0" spc="-3" kern="0">
+              <a:rPr lang="en-US" sz="2550" dirty="0" spc="-1" kern="0">
                 <a:solidFill>
                   <a:srgbClr val="E4E1D8"/>
                 </a:solidFill>
@@ -3573,7 +3573,7 @@
               <a:t> giao</a:t>
             </a:r>
             <a:r>
-              <a:rPr lang="en-US" sz="2250" dirty="0" spc="10" kern="0">
+              <a:rPr lang="en-US" sz="2550" dirty="0" spc="8" kern="0">
                 <a:solidFill>
                   <a:srgbClr val="E4E1D8"/>
                 </a:solidFill>
@@ -3584,7 +3584,7 @@
               <a:t> thức</a:t>
             </a:r>
             <a:r>
-              <a:rPr lang="en-US" sz="2250" dirty="0" spc="-12" kern="0">
+              <a:rPr lang="en-US" sz="2550" dirty="0" spc="-12" kern="0">
                 <a:solidFill>
                   <a:srgbClr val="E4E1D8"/>
                 </a:solidFill>
@@ -3595,7 +3595,7 @@
               <a:t> truyền</a:t>
             </a:r>
             <a:r>
-              <a:rPr lang="en-US" sz="2250" dirty="0" spc="0" kern="0">
+              <a:rPr lang="en-US" sz="2550" dirty="0" spc="1" kern="0">
                 <a:solidFill>
                   <a:srgbClr val="E4E1D8"/>
                 </a:solidFill>
@@ -3606,7 +3606,7 @@
               <a:t> siêu</a:t>
             </a:r>
             <a:r>
-              <a:rPr lang="en-US" sz="2250" dirty="0" spc="-12" kern="0">
+              <a:rPr lang="en-US" sz="2550" dirty="0" spc="-15" kern="0">
                 <a:solidFill>
                   <a:srgbClr val="E4E1D8"/>
                 </a:solidFill>
@@ -3617,7 +3617,7 @@
               <a:t> văn</a:t>
             </a:r>
             <a:r>
-              <a:rPr lang="en-US" sz="2250" dirty="0" spc="-2" kern="0">
+              <a:rPr lang="en-US" sz="2550" dirty="0" spc="-3" kern="0">
                 <a:solidFill>
                   <a:srgbClr val="E4E1D8"/>
                 </a:solidFill>
@@ -3627,7 +3627,7 @@
               </a:rPr>
               <a:t> bản</a:t>
             </a:r>
-            <a:endParaRPr lang="en-US" sz="2250" dirty="0"/>
+            <a:endParaRPr lang="en-US" sz="2550" dirty="0"/>
           </a:p>
         </p:txBody>
       </p:sp>
@@ -3639,12 +3639,12 @@
         </p:nvSpPr>
         <p:spPr>
           <a:xfrm>
-            <a:off x="914400" y="6762750"/>
-            <a:ext cx="9144000" cy="1762125"/>
+            <a:off x="914400" y="6810375"/>
+            <a:ext cx="9144000" cy="1666875"/>
           </a:xfrm>
           <a:prstGeom prst="roundRect">
             <a:avLst>
-              <a:gd name="adj" fmla="val 15135"/>
+              <a:gd name="adj" fmla="val 16000"/>
             </a:avLst>
           </a:prstGeom>
           <a:solidFill>
@@ -3710,17 +3710,17 @@
           <a:ln/>
         </p:spPr>
         <p:txBody>
-          <a:bodyPr wrap="square" lIns="0" tIns="12144" rIns="0" bIns="-12144" rtlCol="0" anchor="t"/>
+          <a:bodyPr wrap="square" lIns="0" tIns="13764" rIns="0" bIns="-13764" rtlCol="0" anchor="t"/>
           <a:lstStyle/>
           <a:p>
             <a:pPr algn="l" indent="0" marL="0">
               <a:lnSpc>
-                <a:spcPts val="2925"/>
+                <a:spcPts val="3315"/>
               </a:lnSpc>
               <a:buNone/>
             </a:pPr>
             <a:r>
-              <a:rPr lang="en-US" sz="2250" dirty="0" spc="-26" kern="0">
+              <a:rPr lang="en-US" sz="2550" dirty="0" spc="-28" kern="0">
                 <a:solidFill>
                   <a:srgbClr val="E4E1D8"/>
                 </a:solidFill>
@@ -3731,7 +3731,7 @@
               <a:t>Load</a:t>
             </a:r>
             <a:r>
-              <a:rPr lang="en-US" sz="2250" dirty="0" spc="0" kern="0">
+              <a:rPr lang="en-US" sz="2550" dirty="0" spc="1" kern="0">
                 <a:solidFill>
                   <a:srgbClr val="E4E1D8"/>
                 </a:solidFill>
@@ -3742,7 +3742,7 @@
               <a:t> Balancer:</a:t>
             </a:r>
             <a:r>
-              <a:rPr lang="en-US" sz="2250" dirty="0" spc="1" kern="0">
+              <a:rPr lang="en-US" sz="2550" dirty="0" spc="-4" kern="0">
                 <a:solidFill>
                   <a:srgbClr val="E4E1D8"/>
                 </a:solidFill>
@@ -3753,7 +3753,7 @@
               <a:t> bộ</a:t>
             </a:r>
             <a:r>
-              <a:rPr lang="en-US" sz="2250" dirty="0" spc="2" kern="0">
+              <a:rPr lang="en-US" sz="2550" dirty="0" spc="0" kern="0">
                 <a:solidFill>
                   <a:srgbClr val="E4E1D8"/>
                 </a:solidFill>
@@ -3764,7 +3764,7 @@
               <a:t> cân</a:t>
             </a:r>
             <a:r>
-              <a:rPr lang="en-US" sz="2250" dirty="0" spc="-2" kern="0">
+              <a:rPr lang="en-US" sz="2550" dirty="0" spc="-2" kern="0">
                 <a:solidFill>
                   <a:srgbClr val="E4E1D8"/>
                 </a:solidFill>
@@ -3775,7 +3775,7 @@
               <a:t> bằng</a:t>
             </a:r>
             <a:r>
-              <a:rPr lang="en-US" sz="2250" dirty="0" spc="-13" kern="0">
+              <a:rPr lang="en-US" sz="2550" dirty="0" spc="-12" kern="0">
                 <a:solidFill>
                   <a:srgbClr val="E4E1D8"/>
                 </a:solidFill>
@@ -3785,7 +3785,7 @@
               </a:rPr>
               <a:t> tải</a:t>
             </a:r>
-            <a:endParaRPr lang="en-US" sz="2250" dirty="0"/>
+            <a:endParaRPr lang="en-US" sz="2550" dirty="0"/>
           </a:p>
         </p:txBody>
       </p:sp>
@@ -3895,12 +3895,12 @@
           <a:ln/>
         </p:spPr>
         <p:txBody>
-          <a:bodyPr wrap="square" lIns="0" tIns="5001" rIns="0" bIns="-5001" rtlCol="0" anchor="t"/>
+          <a:bodyPr wrap="square" lIns="0" tIns="5667" rIns="0" bIns="-5667" rtlCol="0" anchor="t"/>
           <a:lstStyle/>
           <a:p>
-            <a:pPr algn="l" marL="285750" indent="-204151">
+            <a:pPr algn="l" marL="323850" indent="-231371">
               <a:lnSpc>
-                <a:spcPts val="3150"/>
+                <a:spcPts val="3570"/>
               </a:lnSpc>
               <a:spcAft>
                 <a:spcPts val="1050"/>
@@ -3910,7 +3910,7 @@
               <a:buChar char="•"/>
             </a:pPr>
             <a:r>
-              <a:rPr lang="en-US" sz="2250" dirty="0" spc="-5" kern="0">
+              <a:rPr lang="en-US" sz="2550" dirty="0" spc="-3" kern="0">
                 <a:solidFill>
                   <a:srgbClr val="F3EEE3"/>
                 </a:solidFill>
@@ -3921,7 +3921,7 @@
               <a:t>ByteByteGo</a:t>
             </a:r>
             <a:r>
-              <a:rPr lang="en-US" sz="2250" dirty="0" spc="-12" kern="0">
+              <a:rPr lang="en-US" sz="2550" dirty="0" spc="-12" kern="0">
                 <a:solidFill>
                   <a:srgbClr val="F3EEE3"/>
                 </a:solidFill>
@@ -3932,7 +3932,7 @@
               <a:t> tại</a:t>
             </a:r>
             <a:r>
-              <a:rPr lang="en-US" sz="2250" dirty="0" spc="-1" kern="0">
+              <a:rPr lang="en-US" sz="2550" dirty="0" spc="-4" kern="0">
                 <a:solidFill>
                   <a:srgbClr val="F3EEE3"/>
                 </a:solidFill>
@@ -3943,7 +3943,7 @@
               <a:t> snapshot</a:t>
             </a:r>
             <a:r>
-              <a:rPr lang="en-US" sz="2250" dirty="0" spc="3" kern="0">
+              <a:rPr lang="en-US" sz="2550" dirty="0" spc="0" kern="0">
                 <a:solidFill>
                   <a:srgbClr val="F3EEE3"/>
                 </a:solidFill>
@@ -3954,7 +3954,7 @@
               <a:t> cố</a:t>
             </a:r>
             <a:r>
-              <a:rPr lang="en-US" sz="2250" dirty="0" spc="19" kern="0">
+              <a:rPr lang="en-US" sz="2550" dirty="0" spc="21" kern="0">
                 <a:solidFill>
                   <a:srgbClr val="F3EEE3"/>
                 </a:solidFill>
@@ -3964,12 +3964,12 @@
               </a:rPr>
               <a:t> định</a:t>
             </a:r>
-            <a:endParaRPr lang="en-US" sz="2250" dirty="0"/>
+            <a:endParaRPr lang="en-US" sz="2550" dirty="0"/>
           </a:p>
           <a:p>
-            <a:pPr algn="l" marL="285750" indent="-204151">
+            <a:pPr algn="l" marL="323850" indent="-231371">
               <a:lnSpc>
-                <a:spcPts val="3150"/>
+                <a:spcPts val="3570"/>
               </a:lnSpc>
               <a:spcAft>
                 <a:spcPts val="1050"/>
@@ -3979,7 +3979,7 @@
               <a:buChar char="•"/>
             </a:pPr>
             <a:r>
-              <a:rPr lang="en-US" sz="2250" dirty="0" spc="-17" kern="0">
+              <a:rPr lang="en-US" sz="2550" dirty="0" spc="-19" kern="0">
                 <a:solidFill>
                   <a:srgbClr val="F3EEE3"/>
                 </a:solidFill>
@@ -3990,7 +3990,7 @@
               <a:t>Kubernetes:</a:t>
             </a:r>
             <a:r>
-              <a:rPr lang="en-US" sz="2250" dirty="0" spc="-1" kern="0">
+              <a:rPr lang="en-US" sz="2550" dirty="0" spc="-1" kern="0">
                 <a:solidFill>
                   <a:srgbClr val="F3EEE3"/>
                 </a:solidFill>
@@ -4000,12 +4000,12 @@
               </a:rPr>
               <a:t> Service</a:t>
             </a:r>
-            <a:endParaRPr lang="en-US" sz="2250" dirty="0"/>
+            <a:endParaRPr lang="en-US" sz="2550" dirty="0"/>
           </a:p>
           <a:p>
-            <a:pPr algn="l" marL="285750" indent="-204151">
+            <a:pPr algn="l" marL="323850" indent="-231371">
               <a:lnSpc>
-                <a:spcPts val="3150"/>
+                <a:spcPts val="3570"/>
               </a:lnSpc>
               <a:spcAft>
                 <a:spcPts val="1050"/>
@@ -4015,7 +4015,7 @@
               <a:buChar char="•"/>
             </a:pPr>
             <a:r>
-              <a:rPr lang="en-US" sz="2250" dirty="0" spc="-17" kern="0">
+              <a:rPr lang="en-US" sz="2550" dirty="0" spc="-19" kern="0">
                 <a:solidFill>
                   <a:srgbClr val="F3EEE3"/>
                 </a:solidFill>
@@ -4026,7 +4026,7 @@
               <a:t>Kubernetes:</a:t>
             </a:r>
             <a:r>
-              <a:rPr lang="en-US" sz="2250" dirty="0" spc="-12" kern="0">
+              <a:rPr lang="en-US" sz="2550" dirty="0" spc="-16" kern="0">
                 <a:solidFill>
                   <a:srgbClr val="F3EEE3"/>
                 </a:solidFill>
@@ -4037,7 +4037,7 @@
               <a:t> gỡ</a:t>
             </a:r>
             <a:r>
-              <a:rPr lang="en-US" sz="2250" dirty="0" spc="1" kern="0">
+              <a:rPr lang="en-US" sz="2550" dirty="0" spc="-1" kern="0">
                 <a:solidFill>
                   <a:srgbClr val="F3EEE3"/>
                 </a:solidFill>
@@ -4045,25 +4045,14 @@
                 <a:ea typeface="Be Vietnam Pro" pitchFamily="34" charset="-122"/>
                 <a:cs typeface="Be Vietnam Pro" pitchFamily="34" charset="-120"/>
               </a:rPr>
-              <a:t> lỗi</a:t>
-            </a:r>
-            <a:r>
-              <a:rPr lang="en-US" sz="2250" dirty="0" spc="-1" kern="0">
-                <a:solidFill>
-                  <a:srgbClr val="F3EEE3"/>
-                </a:solidFill>
-                <a:latin typeface="Be Vietnam Pro" pitchFamily="34" charset="0"/>
-                <a:ea typeface="Be Vietnam Pro" pitchFamily="34" charset="-122"/>
-                <a:cs typeface="Be Vietnam Pro" pitchFamily="34" charset="-120"/>
-              </a:rPr>
-              <a:t> Service</a:t>
-            </a:r>
-            <a:endParaRPr lang="en-US" sz="2250" dirty="0"/>
+              <a:t> lỗi Service</a:t>
+            </a:r>
+            <a:endParaRPr lang="en-US" sz="2550" dirty="0"/>
           </a:p>
           <a:p>
-            <a:pPr algn="l" marL="285750" indent="-204151">
+            <a:pPr algn="l" marL="323850" indent="-231371">
               <a:lnSpc>
-                <a:spcPts val="3150"/>
+                <a:spcPts val="3570"/>
               </a:lnSpc>
               <a:spcAft>
                 <a:spcPts val="1050"/>
@@ -4073,7 +4062,7 @@
               <a:buChar char="•"/>
             </a:pPr>
             <a:r>
-              <a:rPr lang="en-US" sz="2250" dirty="0" spc="-17" kern="0">
+              <a:rPr lang="en-US" sz="2550" dirty="0" spc="-19" kern="0">
                 <a:solidFill>
                   <a:srgbClr val="F3EEE3"/>
                 </a:solidFill>
@@ -4084,7 +4073,7 @@
               <a:t>Kubernetes:</a:t>
             </a:r>
             <a:r>
-              <a:rPr lang="en-US" sz="2250" dirty="0" spc="2" kern="0">
+              <a:rPr lang="en-US" sz="2550" dirty="0" spc="-2" kern="0">
                 <a:solidFill>
                   <a:srgbClr val="F3EEE3"/>
                 </a:solidFill>
@@ -4095,7 +4084,7 @@
               <a:t> DNS</a:t>
             </a:r>
             <a:r>
-              <a:rPr lang="en-US" sz="2250" dirty="0" spc="1" kern="0">
+              <a:rPr lang="en-US" sz="2550" dirty="0" spc="0" kern="0">
                 <a:solidFill>
                   <a:srgbClr val="F3EEE3"/>
                 </a:solidFill>
@@ -4106,7 +4095,7 @@
               <a:t> cho</a:t>
             </a:r>
             <a:r>
-              <a:rPr lang="en-US" sz="2250" dirty="0" spc="-1" kern="0">
+              <a:rPr lang="en-US" sz="2550" dirty="0" spc="-1" kern="0">
                 <a:solidFill>
                   <a:srgbClr val="F3EEE3"/>
                 </a:solidFill>
@@ -4117,7 +4106,7 @@
               <a:t> Service</a:t>
             </a:r>
             <a:r>
-              <a:rPr lang="en-US" sz="2250" dirty="0" spc="-16" kern="0">
+              <a:rPr lang="en-US" sz="2550" dirty="0" spc="-19" kern="0">
                 <a:solidFill>
                   <a:srgbClr val="F3EEE3"/>
                 </a:solidFill>
@@ -4128,7 +4117,7 @@
               <a:t> và</a:t>
             </a:r>
             <a:r>
-              <a:rPr lang="en-US" sz="2250" dirty="0" spc="-13" kern="0">
+              <a:rPr lang="en-US" sz="2550" dirty="0" spc="-15" kern="0">
                 <a:solidFill>
                   <a:srgbClr val="F3EEE3"/>
                 </a:solidFill>
@@ -4138,19 +4127,19 @@
               </a:rPr>
               <a:t> Pod</a:t>
             </a:r>
-            <a:endParaRPr lang="en-US" sz="2250" dirty="0"/>
+            <a:endParaRPr lang="en-US" sz="2550" dirty="0"/>
           </a:p>
           <a:p>
-            <a:pPr algn="l" marL="285750" indent="-204151">
+            <a:pPr algn="l" marL="323850" indent="-231371">
               <a:lnSpc>
-                <a:spcPts val="3150"/>
+                <a:spcPts val="3570"/>
               </a:lnSpc>
               <a:buSzPct val="100000"/>
               <a:buFont typeface="Arial"/>
               <a:buChar char="•"/>
             </a:pPr>
             <a:r>
-              <a:rPr lang="en-US" sz="2250" dirty="0" spc="-17" kern="0">
+              <a:rPr lang="en-US" sz="2550" dirty="0" spc="-19" kern="0">
                 <a:solidFill>
                   <a:srgbClr val="F3EEE3"/>
                 </a:solidFill>
@@ -4161,7 +4150,7 @@
               <a:t>Kubernetes:</a:t>
             </a:r>
             <a:r>
-              <a:rPr lang="en-US" sz="2250" dirty="0" spc="-4" kern="0">
+              <a:rPr lang="en-US" sz="2550" dirty="0" spc="-4" kern="0">
                 <a:solidFill>
                   <a:srgbClr val="F3EEE3"/>
                 </a:solidFill>
@@ -4171,7 +4160,7 @@
               </a:rPr>
               <a:t> EndpointSlice</a:t>
             </a:r>
-            <a:endParaRPr lang="en-US" sz="2250" dirty="0"/>
+            <a:endParaRPr lang="en-US" sz="2550" dirty="0"/>
           </a:p>
         </p:txBody>
       </p:sp>
@@ -9330,7 +9319,7 @@
               <a:buNone/>
             </a:pPr>
             <a:r>
-              <a:rPr lang="en-US" sz="2475" dirty="0" spc="-4" kern="0">
+              <a:rPr lang="en-US" sz="2550" dirty="0" spc="-2" kern="0">
                 <a:solidFill>
                   <a:srgbClr val="1F3FD1"/>
                 </a:solidFill>
@@ -9340,7 +9329,7 @@
               </a:rPr>
               <a:t>.</a:t>
             </a:r>
-            <a:endParaRPr lang="en-US" sz="2475" dirty="0"/>
+            <a:endParaRPr lang="en-US" sz="2550" dirty="0"/>
           </a:p>
         </p:txBody>
       </p:sp>
@@ -9412,7 +9401,7 @@
               <a:buNone/>
             </a:pPr>
             <a:r>
-              <a:rPr lang="en-US" sz="2400" dirty="0" spc="-2" kern="0">
+              <a:rPr lang="en-US" sz="2550" dirty="0" spc="-4" kern="0">
                 <a:solidFill>
                   <a:srgbClr val="14161C"/>
                 </a:solidFill>
@@ -9423,7 +9412,7 @@
               <a:t>Hoặc</a:t>
             </a:r>
             <a:r>
-              <a:rPr lang="en-US" sz="2400" dirty="0" spc="-11" kern="0">
+              <a:rPr lang="en-US" sz="2550" dirty="0" spc="-11" kern="0">
                 <a:solidFill>
                   <a:srgbClr val="14161C"/>
                 </a:solidFill>
@@ -9434,7 +9423,7 @@
               <a:t> tên</a:t>
             </a:r>
             <a:r>
-              <a:rPr lang="en-US" sz="2400" dirty="0" spc="5" kern="0">
+              <a:rPr lang="en-US" sz="2550" dirty="0" spc="3" kern="0">
                 <a:solidFill>
                   <a:srgbClr val="14161C"/>
                 </a:solidFill>
@@ -9445,7 +9434,7 @@
               <a:t> đầy</a:t>
             </a:r>
             <a:r>
-              <a:rPr lang="en-US" sz="2400" dirty="0" spc="3" kern="0">
+              <a:rPr lang="en-US" sz="2550" dirty="0" spc="-2" kern="0">
                 <a:solidFill>
                   <a:srgbClr val="14161C"/>
                 </a:solidFill>
@@ -9456,7 +9445,7 @@
               <a:t> đủ,</a:t>
             </a:r>
             <a:r>
-              <a:rPr lang="en-US" sz="2400" dirty="0" spc="2" kern="0">
+              <a:rPr lang="en-US" sz="2550" dirty="0" spc="1" kern="0">
                 <a:solidFill>
                   <a:srgbClr val="14161C"/>
                 </a:solidFill>
@@ -9467,7 +9456,7 @@
               <a:t> ghép</a:t>
             </a:r>
             <a:r>
-              <a:rPr lang="en-US" sz="2400" dirty="0" spc="-2" kern="0">
+              <a:rPr lang="en-US" sz="2550" dirty="0" spc="-4" kern="0">
                 <a:solidFill>
                   <a:srgbClr val="14161C"/>
                 </a:solidFill>
@@ -9478,7 +9467,7 @@
               <a:t> bốn</a:t>
             </a:r>
             <a:r>
-              <a:rPr lang="en-US" sz="2400" dirty="0" spc="1" kern="0">
+              <a:rPr lang="en-US" sz="2550" dirty="0" spc="1" kern="0">
                 <a:solidFill>
                   <a:srgbClr val="14161C"/>
                 </a:solidFill>
@@ -9488,7 +9477,7 @@
               </a:rPr>
               <a:t> phần:</a:t>
             </a:r>
-            <a:endParaRPr lang="en-US" sz="2400" dirty="0"/>
+            <a:endParaRPr lang="en-US" sz="2550" dirty="0"/>
           </a:p>
         </p:txBody>
       </p:sp>
@@ -9565,7 +9554,7 @@
               <a:buNone/>
             </a:pPr>
             <a:r>
-              <a:rPr lang="en-US" sz="2474" dirty="0" spc="-4" kern="0">
+              <a:rPr lang="en-US" sz="2550" dirty="0" spc="-2" kern="0">
                 <a:solidFill>
                   <a:srgbClr val="1F3FD1"/>
                 </a:solidFill>
@@ -9575,7 +9564,7 @@
               </a:rPr>
               <a:t>.</a:t>
             </a:r>
-            <a:endParaRPr lang="en-US" sz="2474" dirty="0"/>
+            <a:endParaRPr lang="en-US" sz="2550" dirty="0"/>
           </a:p>
         </p:txBody>
       </p:sp>
@@ -9652,7 +9641,7 @@
               <a:buNone/>
             </a:pPr>
             <a:r>
-              <a:rPr lang="en-US" sz="2474" dirty="0" spc="-4" kern="0">
+              <a:rPr lang="en-US" sz="2550" dirty="0" spc="-2" kern="0">
                 <a:solidFill>
                   <a:srgbClr val="1F3FD1"/>
                 </a:solidFill>
@@ -9662,7 +9651,7 @@
               </a:rPr>
               <a:t>.</a:t>
             </a:r>
-            <a:endParaRPr lang="en-US" sz="2474" dirty="0"/>
+            <a:endParaRPr lang="en-US" sz="2550" dirty="0"/>
           </a:p>
         </p:txBody>
       </p:sp>
@@ -9739,7 +9728,7 @@
               <a:buNone/>
             </a:pPr>
             <a:r>
-              <a:rPr lang="en-US" sz="2474" dirty="0" spc="-4" kern="0">
+              <a:rPr lang="en-US" sz="2550" dirty="0" spc="-2" kern="0">
                 <a:solidFill>
                   <a:srgbClr val="1F3FD1"/>
                 </a:solidFill>
@@ -9749,7 +9738,7 @@
               </a:rPr>
               <a:t>.</a:t>
             </a:r>
-            <a:endParaRPr lang="en-US" sz="2474" dirty="0"/>
+            <a:endParaRPr lang="en-US" sz="2550" dirty="0"/>
           </a:p>
         </p:txBody>
       </p:sp>
@@ -10893,7 +10882,7 @@
               <a:buNone/>
             </a:pPr>
             <a:r>
-              <a:rPr lang="en-US" sz="2250" dirty="0" spc="-9" kern="0">
+              <a:rPr lang="en-US" sz="2550" dirty="0" spc="-6" kern="0">
                 <a:solidFill>
                   <a:srgbClr val="E4E1D8"/>
                 </a:solidFill>
@@ -10904,7 +10893,7 @@
               <a:t>NodePort</a:t>
             </a:r>
             <a:r>
-              <a:rPr lang="en-US" sz="2250" dirty="0" spc="1" kern="0">
+              <a:rPr lang="en-US" sz="2550" dirty="0" spc="0" kern="0">
                 <a:solidFill>
                   <a:srgbClr val="E4E1D8"/>
                 </a:solidFill>
@@ -10915,7 +10904,7 @@
               <a:t> bị</a:t>
             </a:r>
             <a:r>
-              <a:rPr lang="en-US" sz="2250" dirty="0" spc="6" kern="0">
+              <a:rPr lang="en-US" sz="2550" dirty="0" spc="6" kern="0">
                 <a:solidFill>
                   <a:srgbClr val="E4E1D8"/>
                 </a:solidFill>
@@ -10926,7 +10915,7 @@
               <a:t> tường</a:t>
             </a:r>
             <a:r>
-              <a:rPr lang="en-US" sz="2250" dirty="0" spc="10" kern="0">
+              <a:rPr lang="en-US" sz="2550" dirty="0" spc="8" kern="0">
                 <a:solidFill>
                   <a:srgbClr val="E4E1D8"/>
                 </a:solidFill>
@@ -10937,7 +10926,7 @@
               <a:t> lửa</a:t>
             </a:r>
             <a:r>
-              <a:rPr lang="en-US" sz="2250" dirty="0" spc="2" kern="0">
+              <a:rPr lang="en-US" sz="2550" dirty="0" spc="1" kern="0">
                 <a:solidFill>
                   <a:srgbClr val="E4E1D8"/>
                 </a:solidFill>
@@ -10947,7 +10936,7 @@
               </a:rPr>
               <a:t> chặn.</a:t>
             </a:r>
-            <a:endParaRPr lang="en-US" sz="2250" dirty="0"/>
+            <a:endParaRPr lang="en-US" sz="2550" dirty="0"/>
           </a:p>
         </p:txBody>
       </p:sp>
@@ -11098,7 +11087,7 @@
               <a:buNone/>
             </a:pPr>
             <a:r>
-              <a:rPr lang="en-US" sz="2250" dirty="0" spc="-3" kern="0">
+              <a:rPr lang="en-US" sz="2550" dirty="0" spc="0" kern="0">
                 <a:solidFill>
                   <a:srgbClr val="E4E1D8"/>
                 </a:solidFill>
@@ -11109,7 +11098,7 @@
               <a:t>Thiếu</a:t>
             </a:r>
             <a:r>
-              <a:rPr lang="en-US" sz="2250" dirty="0" spc="2" kern="0">
+              <a:rPr lang="en-US" sz="2550" dirty="0" spc="-4" kern="0">
                 <a:solidFill>
                   <a:srgbClr val="E4E1D8"/>
                 </a:solidFill>
@@ -11120,7 +11109,7 @@
               <a:t> bộ</a:t>
             </a:r>
             <a:r>
-              <a:rPr lang="en-US" sz="2250" dirty="0" spc="-13" kern="0">
+              <a:rPr lang="en-US" sz="2550" dirty="0" spc="-12" kern="0">
                 <a:solidFill>
                   <a:srgbClr val="E4E1D8"/>
                 </a:solidFill>
@@ -11131,7 +11120,7 @@
               <a:t> tạo</a:t>
             </a:r>
             <a:r>
-              <a:rPr lang="en-US" sz="2250" dirty="0" spc="4" kern="0">
+              <a:rPr lang="en-US" sz="2550" dirty="0" spc="4" kern="0">
                 <a:solidFill>
                   <a:srgbClr val="E4E1D8"/>
                 </a:solidFill>
@@ -11142,7 +11131,7 @@
               <a:t> LB</a:t>
             </a:r>
             <a:r>
-              <a:rPr lang="en-US" sz="2250" dirty="0" spc="1" kern="0">
+              <a:rPr lang="en-US" sz="2550" dirty="0" spc="-5" kern="0">
                 <a:solidFill>
                   <a:srgbClr val="E4E1D8"/>
                 </a:solidFill>
@@ -11150,10 +11139,10 @@
                 <a:ea typeface="Be Vietnam Pro" pitchFamily="34" charset="-122"/>
                 <a:cs typeface="Be Vietnam Pro" pitchFamily="34" charset="-120"/>
               </a:rPr>
-              <a:t> (bộ cân</a:t>
-            </a:r>
-            <a:r>
-              <a:rPr lang="en-US" sz="2250" dirty="0" spc="-2" kern="0">
+              <a:t> (bộ</a:t>
+            </a:r>
+            <a:r>
+              <a:rPr lang="en-US" sz="2550" dirty="0" spc="0" kern="0">
                 <a:solidFill>
                   <a:srgbClr val="E4E1D8"/>
                 </a:solidFill>
@@ -11161,10 +11150,21 @@
                 <a:ea typeface="Be Vietnam Pro" pitchFamily="34" charset="-122"/>
                 <a:cs typeface="Be Vietnam Pro" pitchFamily="34" charset="-120"/>
               </a:rPr>
+              <a:t> cân</a:t>
+            </a:r>
+            <a:r>
+              <a:rPr lang="en-US" sz="2550" dirty="0" spc="-2" kern="0">
+                <a:solidFill>
+                  <a:srgbClr val="E4E1D8"/>
+                </a:solidFill>
+                <a:latin typeface="Be Vietnam Pro" pitchFamily="34" charset="0"/>
+                <a:ea typeface="Be Vietnam Pro" pitchFamily="34" charset="-122"/>
+                <a:cs typeface="Be Vietnam Pro" pitchFamily="34" charset="-120"/>
+              </a:rPr>
               <a:t> bằng</a:t>
             </a:r>
             <a:r>
-              <a:rPr lang="en-US" sz="2250" dirty="0" spc="-7" kern="0">
+              <a:rPr lang="en-US" sz="2550" dirty="0" spc="-8" kern="0">
                 <a:solidFill>
                   <a:srgbClr val="E4E1D8"/>
                 </a:solidFill>
@@ -11174,7 +11174,7 @@
               </a:rPr>
               <a:t> tải).</a:t>
             </a:r>
-            <a:endParaRPr lang="en-US" sz="2250" dirty="0"/>
+            <a:endParaRPr lang="en-US" sz="2550" dirty="0"/>
           </a:p>
         </p:txBody>
       </p:sp>
@@ -12360,17 +12360,17 @@
           <a:ln/>
         </p:spPr>
         <p:txBody>
-          <a:bodyPr wrap="square" lIns="0" tIns="12144" rIns="0" bIns="-12144" rtlCol="0" anchor="t"/>
+          <a:bodyPr wrap="square" lIns="0" tIns="13764" rIns="0" bIns="-13764" rtlCol="0" anchor="t"/>
           <a:lstStyle/>
           <a:p>
             <a:pPr algn="l" indent="0" marL="0">
               <a:lnSpc>
-                <a:spcPts val="2925"/>
+                <a:spcPts val="3315"/>
               </a:lnSpc>
               <a:buNone/>
             </a:pPr>
             <a:r>
-              <a:rPr lang="en-US" sz="2250" b="1" dirty="0" spc="-10" kern="0">
+              <a:rPr lang="en-US" sz="2550" b="1" dirty="0" spc="-12" kern="0">
                 <a:solidFill>
                   <a:srgbClr val="14161C"/>
                 </a:solidFill>
@@ -12380,17 +12380,17 @@
               </a:rPr>
               <a:t>publishNotReady</a:t>
             </a:r>
-            <a:endParaRPr lang="en-US" sz="2250" dirty="0"/>
+            <a:endParaRPr lang="en-US" sz="2550" dirty="0"/>
           </a:p>
           <a:p>
             <a:pPr algn="l" indent="0" marL="0">
               <a:lnSpc>
-                <a:spcPts val="2925"/>
+                <a:spcPts val="3315"/>
               </a:lnSpc>
               <a:buNone/>
             </a:pPr>
             <a:r>
-              <a:rPr lang="en-US" sz="2250" b="1" dirty="0" spc="-11" kern="0">
+              <a:rPr lang="en-US" sz="2550" b="1" dirty="0" spc="-14" kern="0">
                 <a:solidFill>
                   <a:srgbClr val="14161C"/>
                 </a:solidFill>
@@ -12401,7 +12401,7 @@
               <a:t>Addresses:</a:t>
             </a:r>
             <a:r>
-              <a:rPr lang="en-US" sz="2250" b="1" dirty="0" spc="2" kern="0">
+              <a:rPr lang="en-US" sz="2550" b="1" dirty="0" spc="-1" kern="0">
                 <a:solidFill>
                   <a:srgbClr val="14161C"/>
                 </a:solidFill>
@@ -12411,7 +12411,7 @@
               </a:rPr>
               <a:t> true</a:t>
             </a:r>
-            <a:endParaRPr lang="en-US" sz="2250" dirty="0"/>
+            <a:endParaRPr lang="en-US" sz="2550" dirty="0"/>
           </a:p>
         </p:txBody>
       </p:sp>

--- a/system-design-101/vi/lessons/sd-13-006/slides/sd-13-006.pptx
+++ b/system-design-101/vi/lessons/sd-13-006/slides/sd-13-006.pptx
@@ -11828,7 +11828,7 @@
               <a:t> này</a:t>
             </a:r>
             <a:r>
-              <a:rPr lang="en-US" sz="2850" dirty="0" spc="-13" kern="0">
+              <a:rPr lang="en-US" sz="2850" dirty="0" spc="0" kern="0">
                 <a:solidFill>
                   <a:srgbClr val="6B6A66"/>
                 </a:solidFill>
@@ -11836,32 +11836,10 @@
                 <a:ea typeface="Be Vietnam Pro" pitchFamily="34" charset="-122"/>
                 <a:cs typeface="Be Vietnam Pro" pitchFamily="34" charset="-120"/>
               </a:rPr>
-              <a:t> hoạt</a:t>
-            </a:r>
-            <a:r>
-              <a:rPr lang="en-US" sz="2850" dirty="0" spc="9" kern="0">
-                <a:solidFill>
-                  <a:srgbClr val="6B6A66"/>
-                </a:solidFill>
-                <a:latin typeface="Be Vietnam Pro" pitchFamily="34" charset="0"/>
-                <a:ea typeface="Be Vietnam Pro" pitchFamily="34" charset="-122"/>
-                <a:cs typeface="Be Vietnam Pro" pitchFamily="34" charset="-120"/>
-              </a:rPr>
-              <a:t> động</a:t>
-            </a:r>
-            <a:r>
-              <a:rPr lang="en-US" sz="2850" dirty="0" spc="-1" kern="0">
-                <a:solidFill>
-                  <a:srgbClr val="6B6A66"/>
-                </a:solidFill>
-                <a:latin typeface="Be Vietnam Pro" pitchFamily="34" charset="0"/>
-                <a:ea typeface="Be Vietnam Pro" pitchFamily="34" charset="-122"/>
-                <a:cs typeface="Be Vietnam Pro" pitchFamily="34" charset="-120"/>
-              </a:rPr>
               <a:t> khác,</a:t>
             </a:r>
             <a:r>
-              <a:rPr lang="en-US" sz="2850" dirty="0" spc="22" kern="0">
+              <a:rPr lang="en-US" sz="2850" dirty="0" spc="21" kern="0">
                 <a:solidFill>
                   <a:srgbClr val="6B6A66"/>
                 </a:solidFill>
@@ -12633,7 +12611,7 @@
               <a:t> miền:</a:t>
             </a:r>
             <a:r>
-              <a:rPr lang="en-US" sz="2850" b="1" dirty="0" spc="-9" kern="0">
+              <a:rPr lang="en-US" sz="2850" b="1" dirty="0" spc="-8" kern="0">
                 <a:solidFill>
                   <a:srgbClr val="F3EEE3"/>
                 </a:solidFill>
@@ -12641,18 +12619,7 @@
                 <a:ea typeface="Be Vietnam Pro" pitchFamily="34" charset="-122"/>
                 <a:cs typeface="Be Vietnam Pro" pitchFamily="34" charset="-120"/>
               </a:rPr>
-              <a:t> Ingress</a:t>
-            </a:r>
-            <a:r>
-              <a:rPr lang="en-US" sz="2850" b="1" dirty="0" spc="-2" kern="0">
-                <a:solidFill>
-                  <a:srgbClr val="F3EEE3"/>
-                </a:solidFill>
-                <a:latin typeface="Be Vietnam Pro" pitchFamily="34" charset="0"/>
-                <a:ea typeface="Be Vietnam Pro" pitchFamily="34" charset="-122"/>
-                <a:cs typeface="Be Vietnam Pro" pitchFamily="34" charset="-120"/>
-              </a:rPr>
-              <a:t> hoặc</a:t>
+              <a:t> Ingress,</a:t>
             </a:r>
             <a:r>
               <a:rPr lang="en-US" sz="2850" b="1" dirty="0" spc="-25" kern="0">

--- a/system-design-101/vi/lessons/sd-13-006/slides/sd-13-006.pptx
+++ b/system-design-101/vi/lessons/sd-13-006/slides/sd-13-006.pptx
@@ -5755,7 +5755,7 @@
               <a:t> dữ</a:t>
             </a:r>
             <a:r>
-              <a:rPr lang="en-US" sz="2550" b="1" dirty="0" spc="0" kern="0">
+              <a:rPr lang="en-US" sz="2550" b="1" dirty="0" spc="1" kern="0">
                 <a:solidFill>
                   <a:srgbClr val="14161C"/>
                 </a:solidFill>
@@ -5763,18 +5763,7 @@
                 <a:ea typeface="Be Vietnam Pro" pitchFamily="34" charset="-122"/>
                 <a:cs typeface="Be Vietnam Pro" pitchFamily="34" charset="-120"/>
               </a:rPr>
-              <a:t> liệu</a:t>
-            </a:r>
-            <a:r>
-              <a:rPr lang="en-US" sz="2550" b="1" dirty="0" spc="-6" kern="0">
-                <a:solidFill>
-                  <a:srgbClr val="14161C"/>
-                </a:solidFill>
-                <a:latin typeface="Be Vietnam Pro" pitchFamily="34" charset="0"/>
-                <a:ea typeface="Be Vietnam Pro" pitchFamily="34" charset="-122"/>
-                <a:cs typeface="Be Vietnam Pro" pitchFamily="34" charset="-120"/>
-              </a:rPr>
-              <a:t> chạy.</a:t>
+              <a:t> liệu.</a:t>
             </a:r>
             <a:endParaRPr lang="en-US" sz="2550" dirty="0"/>
           </a:p>
@@ -9280,7 +9269,7 @@
               <a:buNone/>
             </a:pPr>
             <a:r>
-              <a:rPr lang="en-US" sz="2400" b="1" dirty="0" spc="-27" kern="0">
+              <a:rPr lang="en-US" sz="2550" b="1" dirty="0" spc="-24" kern="0">
                 <a:solidFill>
                   <a:srgbClr val="F3EEE3"/>
                 </a:solidFill>
@@ -9290,7 +9279,7 @@
               </a:rPr>
               <a:t>web</a:t>
             </a:r>
-            <a:endParaRPr lang="en-US" sz="2400" dirty="0"/>
+            <a:endParaRPr lang="en-US" sz="2550" dirty="0"/>
           </a:p>
         </p:txBody>
       </p:sp>
@@ -9362,7 +9351,7 @@
               <a:buNone/>
             </a:pPr>
             <a:r>
-              <a:rPr lang="en-US" sz="2400" b="1" dirty="0" spc="-6" kern="0">
+              <a:rPr lang="en-US" sz="2550" b="1" dirty="0" spc="-5" kern="0">
                 <a:solidFill>
                   <a:srgbClr val="F3EEE3"/>
                 </a:solidFill>
@@ -9372,7 +9361,7 @@
               </a:rPr>
               <a:t>ten-namespace</a:t>
             </a:r>
-            <a:endParaRPr lang="en-US" sz="2400" dirty="0"/>
+            <a:endParaRPr lang="en-US" sz="2550" dirty="0"/>
           </a:p>
         </p:txBody>
       </p:sp>
@@ -10768,7 +10757,7 @@
               <a:buNone/>
             </a:pPr>
             <a:r>
-              <a:rPr lang="en-US" sz="2400" b="1" dirty="0" spc="-29" kern="0">
+              <a:rPr lang="en-US" sz="2550" b="1" dirty="0" spc="-27" kern="0">
                 <a:solidFill>
                   <a:srgbClr val="14161C"/>
                 </a:solidFill>
@@ -10779,7 +10768,7 @@
               <a:t>Tường</a:t>
             </a:r>
             <a:r>
-              <a:rPr lang="en-US" sz="2400" b="1" dirty="0" spc="17" kern="0">
+              <a:rPr lang="en-US" sz="2550" b="1" dirty="0" spc="12" kern="0">
                 <a:solidFill>
                   <a:srgbClr val="14161C"/>
                 </a:solidFill>
@@ -10789,7 +10778,7 @@
               </a:rPr>
               <a:t> lửa</a:t>
             </a:r>
-            <a:endParaRPr lang="en-US" sz="2400" dirty="0"/>
+            <a:endParaRPr lang="en-US" sz="2550" dirty="0"/>
           </a:p>
         </p:txBody>
       </p:sp>
@@ -11012,7 +11001,7 @@
               <a:buNone/>
             </a:pPr>
             <a:r>
-              <a:rPr lang="en-US" sz="2400" b="1" dirty="0" spc="-5" kern="0">
+              <a:rPr lang="en-US" sz="2550" b="1" dirty="0" spc="-7" kern="0">
                 <a:solidFill>
                   <a:srgbClr val="FFB454"/>
                 </a:solidFill>
@@ -11023,7 +11012,7 @@
               <a:t>LoadBalancer:</a:t>
             </a:r>
             <a:r>
-              <a:rPr lang="en-US" sz="2400" b="1" dirty="0" spc="-8" kern="0">
+              <a:rPr lang="en-US" sz="2550" b="1" dirty="0" spc="-5" kern="0">
                 <a:solidFill>
                   <a:srgbClr val="FFB454"/>
                 </a:solidFill>
@@ -11033,7 +11022,7 @@
               </a:rPr>
               <a:t> pending</a:t>
             </a:r>
-            <a:endParaRPr lang="en-US" sz="2400" dirty="0"/>
+            <a:endParaRPr lang="en-US" sz="2550" dirty="0"/>
           </a:p>
         </p:txBody>
       </p:sp>

--- a/system-design-101/vi/lessons/sd-13-006/slides/sd-13-006.pptx
+++ b/system-design-101/vi/lessons/sd-13-006/slides/sd-13-006.pptx
@@ -14365,12 +14365,12 @@
                     <a:p>
                       <a:pPr algn="l" indent="0" marL="0">
                         <a:lnSpc>
-                          <a:spcPts val="2880"/>
+                          <a:spcPts val="3060"/>
                         </a:lnSpc>
                         <a:buNone/>
                       </a:pPr>
                       <a:r>
-                        <a:rPr lang="en-US" sz="2400" b="1" dirty="0" spc="-5" kern="0">
+                        <a:rPr lang="en-US" sz="2550" b="1" dirty="0" spc="-4" kern="0">
                           <a:solidFill>
                             <a:srgbClr val="F3EEE3"/>
                           </a:solidFill>
@@ -14381,7 +14381,7 @@
                         <a:t>Chỗ</a:t>
                       </a:r>
                       <a:r>
-                        <a:rPr lang="en-US" sz="2400" b="1" dirty="0" spc="-4" kern="0">
+                        <a:rPr lang="en-US" sz="2550" b="1" dirty="0" spc="-2" kern="0">
                           <a:solidFill>
                             <a:srgbClr val="F3EEE3"/>
                           </a:solidFill>
@@ -14392,7 +14392,7 @@
                         <a:t> kiểm</a:t>
                       </a:r>
                       <a:r>
-                        <a:rPr lang="en-US" sz="2400" b="1" dirty="0" spc="-10" kern="0">
+                        <a:rPr lang="en-US" sz="2550" b="1" dirty="0" spc="-14" kern="0">
                           <a:solidFill>
                             <a:srgbClr val="F3EEE3"/>
                           </a:solidFill>
@@ -14405,7 +14405,7 @@
                       <a:endParaRPr lang="en-US" sz="1200" dirty="0"/>
                     </a:p>
                   </a:txBody>
-                  <a:tcPr marL="304800" marR="304800" marT="304800" marB="304800" anchor="ctr">
+                  <a:tcPr marL="304800" marR="304800" marT="300990" marB="300990" anchor="ctr">
                     <a:lnL w="0" cap="flat" cmpd="sng" algn="ctr">
                       <a:noFill/>
                     </a:lnL>
@@ -14430,12 +14430,12 @@
                     <a:p>
                       <a:pPr algn="l" indent="0" marL="0">
                         <a:lnSpc>
-                          <a:spcPts val="2880"/>
+                          <a:spcPts val="3060"/>
                         </a:lnSpc>
                         <a:buNone/>
                       </a:pPr>
                       <a:r>
-                        <a:rPr lang="en-US" sz="2400" b="1" dirty="0" spc="2" kern="0">
+                        <a:rPr lang="en-US" sz="2550" b="1" dirty="0" spc="4" kern="0">
                           <a:solidFill>
                             <a:srgbClr val="F3EEE3"/>
                           </a:solidFill>
@@ -14446,7 +14446,7 @@
                         <a:t>Cần</a:t>
                       </a:r>
                       <a:r>
-                        <a:rPr lang="en-US" sz="2400" b="1" dirty="0" spc="-4" kern="0">
+                        <a:rPr lang="en-US" sz="2550" b="1" dirty="0" spc="-3" kern="0">
                           <a:solidFill>
                             <a:srgbClr val="F3EEE3"/>
                           </a:solidFill>
@@ -14459,7 +14459,7 @@
                       <a:endParaRPr lang="en-US" sz="1200" dirty="0"/>
                     </a:p>
                   </a:txBody>
-                  <a:tcPr marL="304800" marR="304800" marT="304800" marB="304800" anchor="ctr">
+                  <a:tcPr marL="304800" marR="304800" marT="300990" marB="300990" anchor="ctr">
                     <a:lnL w="19050" cap="flat" cmpd="sng" algn="ctr">
                       <a:solidFill>
                         <a:srgbClr val="3A3F4D"/>
@@ -14492,12 +14492,12 @@
                     <a:p>
                       <a:pPr algn="l" indent="0" marL="0">
                         <a:lnSpc>
-                          <a:spcPts val="2880"/>
+                          <a:spcPts val="3060"/>
                         </a:lnSpc>
                         <a:buNone/>
                       </a:pPr>
                       <a:r>
-                        <a:rPr lang="en-US" sz="2400" dirty="0" spc="-7" kern="0">
+                        <a:rPr lang="en-US" sz="2550" dirty="0" spc="-7" kern="0">
                           <a:solidFill>
                             <a:srgbClr val="F3EEE3"/>
                           </a:solidFill>
@@ -14510,7 +14510,7 @@
                       <a:endParaRPr lang="en-US" sz="1200" dirty="0"/>
                     </a:p>
                   </a:txBody>
-                  <a:tcPr marL="304800" marR="304800" marT="304800" marB="304800" anchor="ctr">
+                  <a:tcPr marL="304800" marR="304800" marT="300990" marB="300990" anchor="ctr">
                     <a:lnL w="0" cap="flat" cmpd="sng" algn="ctr">
                       <a:noFill/>
                     </a:lnL>
@@ -14541,12 +14541,12 @@
                     <a:p>
                       <a:pPr algn="l" indent="0" marL="0">
                         <a:lnSpc>
-                          <a:spcPts val="2880"/>
+                          <a:spcPts val="3060"/>
                         </a:lnSpc>
                         <a:buNone/>
                       </a:pPr>
                       <a:r>
-                        <a:rPr lang="en-US" sz="2400" dirty="0" spc="-1" kern="0">
+                        <a:rPr lang="en-US" sz="2550" dirty="0" spc="1" kern="0">
                           <a:solidFill>
                             <a:srgbClr val="F3EEE3"/>
                           </a:solidFill>
@@ -14557,7 +14557,7 @@
                         <a:t>Mặc</a:t>
                       </a:r>
                       <a:r>
-                        <a:rPr lang="en-US" sz="2400" dirty="0" spc="20" kern="0">
+                        <a:rPr lang="en-US" sz="2550" dirty="0" spc="21" kern="0">
                           <a:solidFill>
                             <a:srgbClr val="F3EEE3"/>
                           </a:solidFill>
@@ -14568,7 +14568,7 @@
                         <a:t> định</a:t>
                       </a:r>
                       <a:r>
-                        <a:rPr lang="en-US" sz="2400" dirty="0" spc="-1" kern="0">
+                        <a:rPr lang="en-US" sz="2550" dirty="0" spc="0" kern="0">
                           <a:solidFill>
                             <a:srgbClr val="F3EEE3"/>
                           </a:solidFill>
@@ -14579,7 +14579,7 @@
                         <a:t> chỉ</a:t>
                       </a:r>
                       <a:r>
-                        <a:rPr lang="en-US" sz="2400" dirty="0" spc="-6" kern="0">
+                        <a:rPr lang="en-US" sz="2550" dirty="0" spc="-7" kern="0">
                           <a:solidFill>
                             <a:srgbClr val="F3EEE3"/>
                           </a:solidFill>
@@ -14590,7 +14590,7 @@
                         <a:t> endpoint</a:t>
                       </a:r>
                       <a:r>
-                        <a:rPr lang="en-US" sz="2400" dirty="0" spc="-16" kern="0">
+                        <a:rPr lang="en-US" sz="2550" dirty="0" spc="-19" kern="0">
                           <a:solidFill>
                             <a:srgbClr val="F3EEE3"/>
                           </a:solidFill>
@@ -14601,7 +14601,7 @@
                         <a:t> ready</a:t>
                       </a:r>
                       <a:r>
-                        <a:rPr lang="en-US" sz="2400" dirty="0" spc="2" kern="0">
+                        <a:rPr lang="en-US" sz="2550" dirty="0" spc="0" kern="0">
                           <a:solidFill>
                             <a:srgbClr val="F3EEE3"/>
                           </a:solidFill>
@@ -14612,7 +14612,7 @@
                         <a:t> nhận</a:t>
                       </a:r>
                       <a:r>
-                        <a:rPr lang="en-US" sz="2400" dirty="0" spc="-19" kern="0">
+                        <a:rPr lang="en-US" sz="2550" dirty="0" spc="-21" kern="0">
                           <a:solidFill>
                             <a:srgbClr val="F3EEE3"/>
                           </a:solidFill>
@@ -14625,7 +14625,7 @@
                       <a:endParaRPr lang="en-US" sz="1200" dirty="0"/>
                     </a:p>
                   </a:txBody>
-                  <a:tcPr marL="304800" marR="304800" marT="304800" marB="304800" anchor="ctr">
+                  <a:tcPr marL="304800" marR="304800" marT="300990" marB="300990" anchor="ctr">
                     <a:lnL w="19050" cap="flat" cmpd="sng" algn="ctr">
                       <a:solidFill>
                         <a:srgbClr val="3A3F4D"/>
@@ -14664,12 +14664,12 @@
                     <a:p>
                       <a:pPr algn="l" indent="0" marL="0">
                         <a:lnSpc>
-                          <a:spcPts val="2880"/>
+                          <a:spcPts val="3060"/>
                         </a:lnSpc>
                         <a:buNone/>
                       </a:pPr>
                       <a:r>
-                        <a:rPr lang="en-US" sz="2400" dirty="0" spc="-24" kern="0">
+                        <a:rPr lang="en-US" sz="2550" dirty="0" spc="-26" kern="0">
                           <a:solidFill>
                             <a:srgbClr val="F3EEE3"/>
                           </a:solidFill>
@@ -14682,7 +14682,7 @@
                       <a:endParaRPr lang="en-US" sz="1200" dirty="0"/>
                     </a:p>
                   </a:txBody>
-                  <a:tcPr marL="304800" marR="304800" marT="304800" marB="304800" anchor="ctr">
+                  <a:tcPr marL="304800" marR="304800" marT="300990" marB="300990" anchor="ctr">
                     <a:lnL w="0" cap="flat" cmpd="sng" algn="ctr">
                       <a:noFill/>
                     </a:lnL>
@@ -14713,12 +14713,12 @@
                     <a:p>
                       <a:pPr algn="l" indent="0" marL="0">
                         <a:lnSpc>
-                          <a:spcPts val="2880"/>
+                          <a:spcPts val="3060"/>
                         </a:lnSpc>
                         <a:buNone/>
                       </a:pPr>
                       <a:r>
-                        <a:rPr lang="en-US" sz="2400" dirty="0" spc="2" kern="0">
+                        <a:rPr lang="en-US" sz="2550" dirty="0" spc="-1" kern="0">
                           <a:solidFill>
                             <a:srgbClr val="F3EEE3"/>
                           </a:solidFill>
@@ -14726,10 +14726,10 @@
                           <a:ea typeface="Be Vietnam Pro" pitchFamily="34" charset="-122"/>
                           <a:cs typeface="Be Vietnam Pro" pitchFamily="34" charset="-120"/>
                         </a:rPr>
-                        <a:t>Không</a:t>
+                        <a:t>Không ghi</a:t>
                       </a:r>
                       <a:r>
-                        <a:rPr lang="en-US" sz="2400" dirty="0" spc="1" kern="0">
+                        <a:rPr lang="en-US" sz="2550" dirty="0" spc="2" kern="0">
                           <a:solidFill>
                             <a:srgbClr val="F3EEE3"/>
                           </a:solidFill>
@@ -14737,10 +14737,10 @@
                           <a:ea typeface="Be Vietnam Pro" pitchFamily="34" charset="-122"/>
                           <a:cs typeface="Be Vietnam Pro" pitchFamily="34" charset="-120"/>
                         </a:rPr>
-                        <a:t> ghi thì bằng</a:t>
+                        <a:t> thì</a:t>
                       </a:r>
                       <a:r>
-                        <a:rPr lang="en-US" sz="2400" dirty="0" spc="0" kern="0">
+                        <a:rPr lang="en-US" sz="2550" dirty="0" spc="-2" kern="0">
                           <a:solidFill>
                             <a:srgbClr val="F3EEE3"/>
                           </a:solidFill>
@@ -14748,21 +14748,10 @@
                           <a:ea typeface="Be Vietnam Pro" pitchFamily="34" charset="-122"/>
                           <a:cs typeface="Be Vietnam Pro" pitchFamily="34" charset="-120"/>
                         </a:rPr>
-                        <a:t> port</a:t>
+                        <a:t> bằng port của</a:t>
                       </a:r>
                       <a:r>
-                        <a:rPr lang="en-US" sz="2400" dirty="0" spc="2" kern="0">
-                          <a:solidFill>
-                            <a:srgbClr val="F3EEE3"/>
-                          </a:solidFill>
-                          <a:latin typeface="Be Vietnam Pro" pitchFamily="34" charset="0"/>
-                          <a:ea typeface="Be Vietnam Pro" pitchFamily="34" charset="-122"/>
-                          <a:cs typeface="Be Vietnam Pro" pitchFamily="34" charset="-120"/>
-                        </a:rPr>
-                        <a:t> của</a:t>
-                      </a:r>
-                      <a:r>
-                        <a:rPr lang="en-US" sz="2400" dirty="0" spc="-1" kern="0">
+                        <a:rPr lang="en-US" sz="2550" dirty="0" spc="-1" kern="0">
                           <a:solidFill>
                             <a:srgbClr val="F3EEE3"/>
                           </a:solidFill>
@@ -14775,7 +14764,7 @@
                       <a:endParaRPr lang="en-US" sz="1200" dirty="0"/>
                     </a:p>
                   </a:txBody>
-                  <a:tcPr marL="304800" marR="304800" marT="304800" marB="304800" anchor="ctr">
+                  <a:tcPr marL="304800" marR="304800" marT="300990" marB="300990" anchor="ctr">
                     <a:lnL w="19050" cap="flat" cmpd="sng" algn="ctr">
                       <a:solidFill>
                         <a:srgbClr val="3A3F4D"/>
@@ -14814,12 +14803,12 @@
                     <a:p>
                       <a:pPr algn="l" indent="0" marL="0">
                         <a:lnSpc>
-                          <a:spcPts val="2880"/>
+                          <a:spcPts val="3060"/>
                         </a:lnSpc>
                         <a:buNone/>
                       </a:pPr>
                       <a:r>
-                        <a:rPr lang="en-US" sz="2400" dirty="0" spc="-73" kern="0">
+                        <a:rPr lang="en-US" sz="2550" dirty="0" spc="-78" kern="0">
                           <a:solidFill>
                             <a:srgbClr val="F3EEE3"/>
                           </a:solidFill>
@@ -14830,7 +14819,7 @@
                         <a:t>Tên</a:t>
                       </a:r>
                       <a:r>
-                        <a:rPr lang="en-US" sz="2400" dirty="0" spc="-2" kern="0">
+                        <a:rPr lang="en-US" sz="2550" dirty="0" spc="-2" kern="0">
                           <a:solidFill>
                             <a:srgbClr val="F3EEE3"/>
                           </a:solidFill>
@@ -14843,7 +14832,7 @@
                       <a:endParaRPr lang="en-US" sz="1200" dirty="0"/>
                     </a:p>
                   </a:txBody>
-                  <a:tcPr marL="304800" marR="304800" marT="304800" marB="304800" anchor="ctr">
+                  <a:tcPr marL="304800" marR="304800" marT="300990" marB="300990" anchor="ctr">
                     <a:lnL w="0" cap="flat" cmpd="sng" algn="ctr">
                       <a:noFill/>
                     </a:lnL>
@@ -14874,12 +14863,12 @@
                     <a:p>
                       <a:pPr algn="l" indent="0" marL="0">
                         <a:lnSpc>
-                          <a:spcPts val="2880"/>
+                          <a:spcPts val="3060"/>
                         </a:lnSpc>
                         <a:buNone/>
                       </a:pPr>
                       <a:r>
-                        <a:rPr lang="en-US" sz="2400" dirty="0" spc="1" kern="0">
+                        <a:rPr lang="en-US" sz="2550" dirty="0" spc="-1" kern="0">
                           <a:solidFill>
                             <a:srgbClr val="F3EEE3"/>
                           </a:solidFill>
@@ -14887,21 +14876,10 @@
                           <a:ea typeface="Be Vietnam Pro" pitchFamily="34" charset="-122"/>
                           <a:cs typeface="Be Vietnam Pro" pitchFamily="34" charset="-120"/>
                         </a:rPr>
-                        <a:t>Khác</a:t>
+                        <a:t>Khác namespace:</a:t>
                       </a:r>
                       <a:r>
-                        <a:rPr lang="en-US" sz="2400" dirty="0" spc="0" kern="0">
-                          <a:solidFill>
-                            <a:srgbClr val="F3EEE3"/>
-                          </a:solidFill>
-                          <a:latin typeface="Be Vietnam Pro" pitchFamily="34" charset="0"/>
-                          <a:ea typeface="Be Vietnam Pro" pitchFamily="34" charset="-122"/>
-                          <a:cs typeface="Be Vietnam Pro" pitchFamily="34" charset="-120"/>
-                        </a:rPr>
-                        <a:t> namespace:</a:t>
-                      </a:r>
-                      <a:r>
-                        <a:rPr lang="en-US" sz="2400" dirty="0" spc="1" kern="0">
+                        <a:rPr lang="en-US" sz="2550" dirty="0" spc="2" kern="0">
                           <a:solidFill>
                             <a:srgbClr val="F3EEE3"/>
                           </a:solidFill>
@@ -14912,7 +14890,7 @@
                         <a:t> thêm</a:t>
                       </a:r>
                       <a:r>
-                        <a:rPr lang="en-US" sz="2400" dirty="0" spc="-12" kern="0">
+                        <a:rPr lang="en-US" sz="2550" dirty="0" spc="-12" kern="0">
                           <a:solidFill>
                             <a:srgbClr val="F3EEE3"/>
                           </a:solidFill>
@@ -14923,7 +14901,7 @@
                         <a:t> tên</a:t>
                       </a:r>
                       <a:r>
-                        <a:rPr lang="en-US" sz="2400" dirty="0" spc="0" kern="0">
+                        <a:rPr lang="en-US" sz="2550" dirty="0" spc="-1" kern="0">
                           <a:solidFill>
                             <a:srgbClr val="F3EEE3"/>
                           </a:solidFill>
@@ -14934,7 +14912,7 @@
                         <a:t> namespace</a:t>
                       </a:r>
                       <a:r>
-                        <a:rPr lang="en-US" sz="2400" dirty="0" spc="-11" kern="0">
+                        <a:rPr lang="en-US" sz="2550" dirty="0" spc="-14" kern="0">
                           <a:solidFill>
                             <a:srgbClr val="F3EEE3"/>
                           </a:solidFill>
@@ -14945,7 +14923,7 @@
                         <a:t> vào</a:t>
                       </a:r>
                       <a:r>
-                        <a:rPr lang="en-US" sz="2400" dirty="0" spc="-12" kern="0">
+                        <a:rPr lang="en-US" sz="2550" dirty="0" spc="-12" kern="0">
                           <a:solidFill>
                             <a:srgbClr val="F3EEE3"/>
                           </a:solidFill>
@@ -14958,7 +14936,7 @@
                       <a:endParaRPr lang="en-US" sz="1200" dirty="0"/>
                     </a:p>
                   </a:txBody>
-                  <a:tcPr marL="304800" marR="304800" marT="304800" marB="304800" anchor="ctr">
+                  <a:tcPr marL="304800" marR="304800" marT="300990" marB="300990" anchor="ctr">
                     <a:lnL w="19050" cap="flat" cmpd="sng" algn="ctr">
                       <a:solidFill>
                         <a:srgbClr val="3A3F4D"/>
@@ -14997,12 +14975,12 @@
                     <a:p>
                       <a:pPr algn="l" indent="0" marL="0">
                         <a:lnSpc>
-                          <a:spcPts val="2880"/>
+                          <a:spcPts val="3060"/>
                         </a:lnSpc>
                         <a:buNone/>
                       </a:pPr>
                       <a:r>
-                        <a:rPr lang="en-US" sz="2400" dirty="0" spc="-7" kern="0">
+                        <a:rPr lang="en-US" sz="2550" dirty="0" spc="-6" kern="0">
                           <a:solidFill>
                             <a:srgbClr val="F3EEE3"/>
                           </a:solidFill>
@@ -15015,7 +14993,7 @@
                       <a:endParaRPr lang="en-US" sz="1200" dirty="0"/>
                     </a:p>
                   </a:txBody>
-                  <a:tcPr marL="304800" marR="304800" marT="304800" marB="304800" anchor="ctr">
+                  <a:tcPr marL="304800" marR="304800" marT="300990" marB="300990" anchor="ctr">
                     <a:lnL w="0" cap="flat" cmpd="sng" algn="ctr">
                       <a:noFill/>
                     </a:lnL>
@@ -15046,12 +15024,12 @@
                     <a:p>
                       <a:pPr algn="l" indent="0" marL="0">
                         <a:lnSpc>
-                          <a:spcPts val="2880"/>
+                          <a:spcPts val="3060"/>
                         </a:lnSpc>
                         <a:buNone/>
                       </a:pPr>
                       <a:r>
-                        <a:rPr lang="en-US" sz="2400" dirty="0" spc="-1" kern="0">
+                        <a:rPr lang="en-US" sz="2550" dirty="0" spc="1" kern="0">
                           <a:solidFill>
                             <a:srgbClr val="F3EEE3"/>
                           </a:solidFill>
@@ -15062,7 +15040,7 @@
                         <a:t>Mặc</a:t>
                       </a:r>
                       <a:r>
-                        <a:rPr lang="en-US" sz="2400" dirty="0" spc="20" kern="0">
+                        <a:rPr lang="en-US" sz="2550" dirty="0" spc="21" kern="0">
                           <a:solidFill>
                             <a:srgbClr val="F3EEE3"/>
                           </a:solidFill>
@@ -15073,7 +15051,7 @@
                         <a:t> định</a:t>
                       </a:r>
                       <a:r>
-                        <a:rPr lang="en-US" sz="2400" dirty="0" spc="1" kern="0">
+                        <a:rPr lang="en-US" sz="2550" dirty="0" spc="0" kern="0">
                           <a:solidFill>
                             <a:srgbClr val="F3EEE3"/>
                           </a:solidFill>
@@ -15084,7 +15062,7 @@
                         <a:t> dải</a:t>
                       </a:r>
                       <a:r>
-                        <a:rPr lang="en-US" sz="2400" dirty="0" spc="-22" kern="0">
+                        <a:rPr lang="en-US" sz="2550" dirty="0" spc="-23" kern="0">
                           <a:solidFill>
                             <a:srgbClr val="F3EEE3"/>
                           </a:solidFill>
@@ -15095,7 +15073,7 @@
                         <a:t> 30000–32767</a:t>
                       </a:r>
                       <a:r>
-                        <a:rPr lang="en-US" sz="2400" dirty="0" spc="-17" kern="0">
+                        <a:rPr lang="en-US" sz="2550" dirty="0" spc="-19" kern="0">
                           <a:solidFill>
                             <a:srgbClr val="F3EEE3"/>
                           </a:solidFill>
@@ -15106,7 +15084,7 @@
                         <a:t> trên</a:t>
                       </a:r>
                       <a:r>
-                        <a:rPr lang="en-US" sz="2400" dirty="0" spc="2" kern="0">
+                        <a:rPr lang="en-US" sz="2550" dirty="0" spc="0" kern="0">
                           <a:solidFill>
                             <a:srgbClr val="F3EEE3"/>
                           </a:solidFill>
@@ -15117,7 +15095,7 @@
                         <a:t> mọi</a:t>
                       </a:r>
                       <a:r>
-                        <a:rPr lang="en-US" sz="2400" dirty="0" spc="-1" kern="0">
+                        <a:rPr lang="en-US" sz="2550" dirty="0" spc="-2" kern="0">
                           <a:solidFill>
                             <a:srgbClr val="F3EEE3"/>
                           </a:solidFill>
@@ -15130,7 +15108,7 @@
                       <a:endParaRPr lang="en-US" sz="1200" dirty="0"/>
                     </a:p>
                   </a:txBody>
-                  <a:tcPr marL="304800" marR="304800" marT="304800" marB="304800" anchor="ctr">
+                  <a:tcPr marL="304800" marR="304800" marT="300990" marB="300990" anchor="ctr">
                     <a:lnL w="19050" cap="flat" cmpd="sng" algn="ctr">
                       <a:solidFill>
                         <a:srgbClr val="3A3F4D"/>
@@ -15169,12 +15147,12 @@
                     <a:p>
                       <a:pPr algn="l" indent="0" marL="0">
                         <a:lnSpc>
-                          <a:spcPts val="2880"/>
+                          <a:spcPts val="3060"/>
                         </a:lnSpc>
                         <a:buNone/>
                       </a:pPr>
                       <a:r>
-                        <a:rPr lang="en-US" sz="2400" dirty="0" spc="-8" kern="0">
+                        <a:rPr lang="en-US" sz="2550" dirty="0" spc="-9" kern="0">
                           <a:solidFill>
                             <a:srgbClr val="F3EEE3"/>
                           </a:solidFill>
@@ -15187,7 +15165,7 @@
                       <a:endParaRPr lang="en-US" sz="1200" dirty="0"/>
                     </a:p>
                   </a:txBody>
-                  <a:tcPr marL="304800" marR="304800" marT="304800" marB="304800" anchor="ctr">
+                  <a:tcPr marL="304800" marR="304800" marT="300990" marB="300990" anchor="ctr">
                     <a:lnL w="0" cap="flat" cmpd="sng" algn="ctr">
                       <a:noFill/>
                     </a:lnL>
@@ -15218,12 +15196,12 @@
                     <a:p>
                       <a:pPr algn="l" indent="0" marL="0">
                         <a:lnSpc>
-                          <a:spcPts val="2880"/>
+                          <a:spcPts val="3060"/>
                         </a:lnSpc>
                         <a:buNone/>
                       </a:pPr>
                       <a:r>
-                        <a:rPr lang="en-US" sz="2400" dirty="0" spc="1" kern="0">
+                        <a:rPr lang="en-US" sz="2550" dirty="0" spc="1" kern="0">
                           <a:solidFill>
                             <a:srgbClr val="F3EEE3"/>
                           </a:solidFill>
@@ -15231,10 +15209,10 @@
                           <a:ea typeface="Be Vietnam Pro" pitchFamily="34" charset="-122"/>
                           <a:cs typeface="Be Vietnam Pro" pitchFamily="34" charset="-120"/>
                         </a:rPr>
-                        <a:t>Cần nhà</a:t>
+                        <a:t>Cần</a:t>
                       </a:r>
                       <a:r>
-                        <a:rPr lang="en-US" sz="2400" dirty="0" spc="0" kern="0">
+                        <a:rPr lang="en-US" sz="2550" dirty="0" spc="0" kern="0">
                           <a:solidFill>
                             <a:srgbClr val="F3EEE3"/>
                           </a:solidFill>
@@ -15242,10 +15220,10 @@
                           <a:ea typeface="Be Vietnam Pro" pitchFamily="34" charset="-122"/>
                           <a:cs typeface="Be Vietnam Pro" pitchFamily="34" charset="-120"/>
                         </a:rPr>
-                        <a:t> cung</a:t>
+                        <a:t> nhà</a:t>
                       </a:r>
                       <a:r>
-                        <a:rPr lang="en-US" sz="2400" dirty="0" spc="2" kern="0">
+                        <a:rPr lang="en-US" sz="2550" dirty="0" spc="1" kern="0">
                           <a:solidFill>
                             <a:srgbClr val="F3EEE3"/>
                           </a:solidFill>
@@ -15253,21 +15231,10 @@
                           <a:ea typeface="Be Vietnam Pro" pitchFamily="34" charset="-122"/>
                           <a:cs typeface="Be Vietnam Pro" pitchFamily="34" charset="-120"/>
                         </a:rPr>
-                        <a:t> cấp</a:t>
+                        <a:t> cung cấp cloud</a:t>
                       </a:r>
                       <a:r>
-                        <a:rPr lang="en-US" sz="2400" dirty="0" spc="0" kern="0">
-                          <a:solidFill>
-                            <a:srgbClr val="F3EEE3"/>
-                          </a:solidFill>
-                          <a:latin typeface="Be Vietnam Pro" pitchFamily="34" charset="0"/>
-                          <a:ea typeface="Be Vietnam Pro" pitchFamily="34" charset="-122"/>
-                          <a:cs typeface="Be Vietnam Pro" pitchFamily="34" charset="-120"/>
-                        </a:rPr>
-                        <a:t> cloud</a:t>
-                      </a:r>
-                      <a:r>
-                        <a:rPr lang="en-US" sz="2400" dirty="0" spc="-2" kern="0">
+                        <a:rPr lang="en-US" sz="2550" dirty="0" spc="-3" kern="0">
                           <a:solidFill>
                             <a:srgbClr val="F3EEE3"/>
                           </a:solidFill>
@@ -15278,7 +15245,7 @@
                         <a:t> hoặc</a:t>
                       </a:r>
                       <a:r>
-                        <a:rPr lang="en-US" sz="2400" dirty="0" spc="1" kern="0">
+                        <a:rPr lang="en-US" sz="2550" dirty="0" spc="1" kern="0">
                           <a:solidFill>
                             <a:srgbClr val="F3EEE3"/>
                           </a:solidFill>
@@ -15289,7 +15256,7 @@
                         <a:t> thành</a:t>
                       </a:r>
                       <a:r>
-                        <a:rPr lang="en-US" sz="2400" dirty="0" spc="2" kern="0">
+                        <a:rPr lang="en-US" sz="2550" dirty="0" spc="-1" kern="0">
                           <a:solidFill>
                             <a:srgbClr val="F3EEE3"/>
                           </a:solidFill>
@@ -15300,7 +15267,7 @@
                         <a:t> phần</a:t>
                       </a:r>
                       <a:r>
-                        <a:rPr lang="en-US" sz="2400" dirty="0" spc="-1" kern="0">
+                        <a:rPr lang="en-US" sz="2550" dirty="0" spc="-2" kern="0">
                           <a:solidFill>
                             <a:srgbClr val="F3EEE3"/>
                           </a:solidFill>
@@ -15311,7 +15278,7 @@
                         <a:t> như</a:t>
                       </a:r>
                       <a:r>
-                        <a:rPr lang="en-US" sz="2400" dirty="0" spc="-8" kern="0">
+                        <a:rPr lang="en-US" sz="2550" dirty="0" spc="-8" kern="0">
                           <a:solidFill>
                             <a:srgbClr val="F3EEE3"/>
                           </a:solidFill>
@@ -15324,7 +15291,7 @@
                       <a:endParaRPr lang="en-US" sz="1200" dirty="0"/>
                     </a:p>
                   </a:txBody>
-                  <a:tcPr marL="304800" marR="304800" marT="304800" marB="304800" anchor="ctr">
+                  <a:tcPr marL="304800" marR="304800" marT="300990" marB="300990" anchor="ctr">
                     <a:lnL w="19050" cap="flat" cmpd="sng" algn="ctr">
                       <a:solidFill>
                         <a:srgbClr val="3A3F4D"/>
